--- a/PPTs/L6-Exercises.pptx
+++ b/PPTs/L6-Exercises.pptx
@@ -3826,7 +3826,7 @@
                 <a:latin typeface="Times New Roman"/>
                 <a:cs typeface="Times New Roman"/>
               </a:rPr>
-              <a:t> </a:t>
+              <a:t>, </a:t>
             </a:r>
             <a:r>
               <a:rPr lang="en-GB" sz="2400" b="0" dirty="0">
@@ -5947,7 +5947,7 @@
           <a:p>
             <a:r>
               <a:rPr lang="en-GB" dirty="0"/>
-              <a:t>Q3 RM, EDF, LLF</a:t>
+              <a:t>Q3. RM, EDF, LLF</a:t>
             </a:r>
             <a:endParaRPr lang="en-SE" dirty="0"/>
           </a:p>
@@ -8896,7 +8896,7 @@
                           <a:ea typeface="Tahoma" panose="020B0604030504040204" pitchFamily="34" charset="0"/>
                           <a:cs typeface="Tahoma" panose="020B0604030504040204" pitchFamily="34" charset="0"/>
                         </a:rPr>
-                        <a:t>T=9</a:t>
+                        <a:t>t=9</a:t>
                       </a:r>
                     </a:p>
                   </a:txBody>
@@ -9050,7 +9050,7 @@
           <a:p>
             <a:r>
               <a:rPr lang="en-GB" dirty="0"/>
-              <a:t>2. Under RM scheduling,  use utilization bound and Response Time Analysis (RTA) to determine taskset </a:t>
+              <a:t>2. Under RM scheduling, use utilization bound and Response Time Analysis (RTA) to determine taskset </a:t>
             </a:r>
             <a:r>
               <a:rPr lang="en-GB" dirty="0" err="1"/>
